--- a/Bemutató.pptx
+++ b/Bemutató.pptx
@@ -110,6 +110,11 @@
       </a:defRPr>
     </a:lvl9pPr>
   </p:defaultTextStyle>
+  <p:extLst>
+    <p:ext uri="{EFAFB233-063F-42B5-8137-9DF3F51BA10A}">
+      <p15:sldGuideLst xmlns:p15="http://schemas.microsoft.com/office/powerpoint/2012/main"/>
+    </p:ext>
+  </p:extLst>
 </p:presentation>
 </file>
 
@@ -566,7 +571,7 @@
           <a:p>
             <a:fld id="{4D4C322F-BC9B-42E0-BD88-98D7F3AB06DE}" type="datetimeFigureOut">
               <a:rPr lang="hu-HU" smtClean="0"/>
-              <a:t>2026.02.23</a:t>
+              <a:t>2026.02.25</a:t>
             </a:fld>
             <a:endParaRPr lang="hu-HU"/>
           </a:p>
@@ -898,7 +903,7 @@
           <a:p>
             <a:fld id="{4D4C322F-BC9B-42E0-BD88-98D7F3AB06DE}" type="datetimeFigureOut">
               <a:rPr lang="hu-HU" smtClean="0"/>
-              <a:t>2026.02.23</a:t>
+              <a:t>2026.02.25</a:t>
             </a:fld>
             <a:endParaRPr lang="hu-HU"/>
           </a:p>
@@ -1094,7 +1099,7 @@
           <a:p>
             <a:fld id="{4D4C322F-BC9B-42E0-BD88-98D7F3AB06DE}" type="datetimeFigureOut">
               <a:rPr lang="hu-HU" smtClean="0"/>
-              <a:t>2026.02.23</a:t>
+              <a:t>2026.02.25</a:t>
             </a:fld>
             <a:endParaRPr lang="hu-HU"/>
           </a:p>
@@ -1364,7 +1369,7 @@
           <a:p>
             <a:fld id="{4D4C322F-BC9B-42E0-BD88-98D7F3AB06DE}" type="datetimeFigureOut">
               <a:rPr lang="hu-HU" smtClean="0"/>
-              <a:t>2026.02.23</a:t>
+              <a:t>2026.02.25</a:t>
             </a:fld>
             <a:endParaRPr lang="hu-HU"/>
           </a:p>
@@ -1792,7 +1797,7 @@
           <a:p>
             <a:fld id="{4D4C322F-BC9B-42E0-BD88-98D7F3AB06DE}" type="datetimeFigureOut">
               <a:rPr lang="hu-HU" smtClean="0"/>
-              <a:t>2026.02.23</a:t>
+              <a:t>2026.02.25</a:t>
             </a:fld>
             <a:endParaRPr lang="hu-HU"/>
           </a:p>
@@ -2342,7 +2347,7 @@
           <a:p>
             <a:fld id="{4D4C322F-BC9B-42E0-BD88-98D7F3AB06DE}" type="datetimeFigureOut">
               <a:rPr lang="hu-HU" smtClean="0"/>
-              <a:t>2026.02.23</a:t>
+              <a:t>2026.02.25</a:t>
             </a:fld>
             <a:endParaRPr lang="hu-HU"/>
           </a:p>
@@ -3132,7 +3137,7 @@
           <a:p>
             <a:fld id="{4D4C322F-BC9B-42E0-BD88-98D7F3AB06DE}" type="datetimeFigureOut">
               <a:rPr lang="hu-HU" smtClean="0"/>
-              <a:t>2026.02.23</a:t>
+              <a:t>2026.02.25</a:t>
             </a:fld>
             <a:endParaRPr lang="hu-HU"/>
           </a:p>
@@ -3311,7 +3316,7 @@
           <a:p>
             <a:fld id="{4D4C322F-BC9B-42E0-BD88-98D7F3AB06DE}" type="datetimeFigureOut">
               <a:rPr lang="hu-HU" smtClean="0"/>
-              <a:t>2026.02.23</a:t>
+              <a:t>2026.02.25</a:t>
             </a:fld>
             <a:endParaRPr lang="hu-HU"/>
           </a:p>
@@ -3495,7 +3500,7 @@
           <a:p>
             <a:fld id="{4D4C322F-BC9B-42E0-BD88-98D7F3AB06DE}" type="datetimeFigureOut">
               <a:rPr lang="hu-HU" smtClean="0"/>
-              <a:t>2026.02.23</a:t>
+              <a:t>2026.02.25</a:t>
             </a:fld>
             <a:endParaRPr lang="hu-HU"/>
           </a:p>
@@ -3670,7 +3675,7 @@
           <a:p>
             <a:fld id="{4D4C322F-BC9B-42E0-BD88-98D7F3AB06DE}" type="datetimeFigureOut">
               <a:rPr lang="hu-HU" smtClean="0"/>
-              <a:t>2026.02.23</a:t>
+              <a:t>2026.02.25</a:t>
             </a:fld>
             <a:endParaRPr lang="hu-HU"/>
           </a:p>
@@ -3920,7 +3925,7 @@
           <a:p>
             <a:fld id="{4D4C322F-BC9B-42E0-BD88-98D7F3AB06DE}" type="datetimeFigureOut">
               <a:rPr lang="hu-HU" smtClean="0"/>
-              <a:t>2026.02.23</a:t>
+              <a:t>2026.02.25</a:t>
             </a:fld>
             <a:endParaRPr lang="hu-HU"/>
           </a:p>
@@ -4157,7 +4162,7 @@
           <a:p>
             <a:fld id="{4D4C322F-BC9B-42E0-BD88-98D7F3AB06DE}" type="datetimeFigureOut">
               <a:rPr lang="hu-HU" smtClean="0"/>
-              <a:t>2026.02.23</a:t>
+              <a:t>2026.02.25</a:t>
             </a:fld>
             <a:endParaRPr lang="hu-HU"/>
           </a:p>
@@ -4542,7 +4547,7 @@
           <a:p>
             <a:fld id="{4D4C322F-BC9B-42E0-BD88-98D7F3AB06DE}" type="datetimeFigureOut">
               <a:rPr lang="hu-HU" smtClean="0"/>
-              <a:t>2026.02.23</a:t>
+              <a:t>2026.02.25</a:t>
             </a:fld>
             <a:endParaRPr lang="hu-HU"/>
           </a:p>
@@ -4660,7 +4665,7 @@
           <a:p>
             <a:fld id="{4D4C322F-BC9B-42E0-BD88-98D7F3AB06DE}" type="datetimeFigureOut">
               <a:rPr lang="hu-HU" smtClean="0"/>
-              <a:t>2026.02.23</a:t>
+              <a:t>2026.02.25</a:t>
             </a:fld>
             <a:endParaRPr lang="hu-HU"/>
           </a:p>
@@ -4755,7 +4760,7 @@
           <a:p>
             <a:fld id="{4D4C322F-BC9B-42E0-BD88-98D7F3AB06DE}" type="datetimeFigureOut">
               <a:rPr lang="hu-HU" smtClean="0"/>
-              <a:t>2026.02.23</a:t>
+              <a:t>2026.02.25</a:t>
             </a:fld>
             <a:endParaRPr lang="hu-HU"/>
           </a:p>
@@ -5008,7 +5013,7 @@
           <a:p>
             <a:fld id="{4D4C322F-BC9B-42E0-BD88-98D7F3AB06DE}" type="datetimeFigureOut">
               <a:rPr lang="hu-HU" smtClean="0"/>
-              <a:t>2026.02.23</a:t>
+              <a:t>2026.02.25</a:t>
             </a:fld>
             <a:endParaRPr lang="hu-HU"/>
           </a:p>
@@ -5277,7 +5282,7 @@
           <a:p>
             <a:fld id="{4D4C322F-BC9B-42E0-BD88-98D7F3AB06DE}" type="datetimeFigureOut">
               <a:rPr lang="hu-HU" smtClean="0"/>
-              <a:t>2026.02.23</a:t>
+              <a:t>2026.02.25</a:t>
             </a:fld>
             <a:endParaRPr lang="hu-HU"/>
           </a:p>
@@ -5680,7 +5685,7 @@
           <a:p>
             <a:fld id="{4D4C322F-BC9B-42E0-BD88-98D7F3AB06DE}" type="datetimeFigureOut">
               <a:rPr lang="hu-HU" smtClean="0"/>
-              <a:t>2026.02.23</a:t>
+              <a:t>2026.02.25</a:t>
             </a:fld>
             <a:endParaRPr lang="hu-HU"/>
           </a:p>
@@ -6229,6 +6234,18 @@
   <p:clrMapOvr>
     <a:masterClrMapping/>
   </p:clrMapOvr>
+  <mc:AlternateContent xmlns:mc="http://schemas.openxmlformats.org/markup-compatibility/2006">
+    <mc:Choice xmlns:p14="http://schemas.microsoft.com/office/powerpoint/2010/main" Requires="p14">
+      <p:transition spd="slow" p14:dur="2500">
+        <p:checker/>
+      </p:transition>
+    </mc:Choice>
+    <mc:Fallback>
+      <p:transition spd="slow">
+        <p:checker/>
+      </p:transition>
+    </mc:Fallback>
+  </mc:AlternateContent>
 </p:sld>
 </file>
 
@@ -7502,6 +7519,18 @@
   <p:clrMapOvr>
     <a:masterClrMapping/>
   </p:clrMapOvr>
+  <mc:AlternateContent xmlns:mc="http://schemas.openxmlformats.org/markup-compatibility/2006">
+    <mc:Choice xmlns:p14="http://schemas.microsoft.com/office/powerpoint/2010/main" Requires="p14">
+      <p:transition spd="slow" p14:dur="800">
+        <p:circle/>
+      </p:transition>
+    </mc:Choice>
+    <mc:Fallback>
+      <p:transition spd="slow">
+        <p:circle/>
+      </p:transition>
+    </mc:Fallback>
+  </mc:AlternateContent>
 </p:sld>
 </file>
 
@@ -8204,6 +8233,18 @@
   <p:clrMapOvr>
     <a:masterClrMapping/>
   </p:clrMapOvr>
+  <mc:AlternateContent xmlns:mc="http://schemas.openxmlformats.org/markup-compatibility/2006">
+    <mc:Choice xmlns:p14="http://schemas.microsoft.com/office/powerpoint/2010/main" Requires="p14">
+      <p:transition spd="slow" p14:dur="1250">
+        <p14:switch dir="r"/>
+      </p:transition>
+    </mc:Choice>
+    <mc:Fallback>
+      <p:transition spd="slow">
+        <p:fade/>
+      </p:transition>
+    </mc:Fallback>
+  </mc:AlternateContent>
 </p:sld>
 </file>
 
@@ -8906,6 +8947,18 @@
   <p:clrMapOvr>
     <a:masterClrMapping/>
   </p:clrMapOvr>
+  <mc:AlternateContent xmlns:mc="http://schemas.openxmlformats.org/markup-compatibility/2006">
+    <mc:Choice xmlns:p15="http://schemas.microsoft.com/office/powerpoint/2012/main" Requires="p15">
+      <p:transition xmlns:p14="http://schemas.microsoft.com/office/powerpoint/2010/main" spd="slow" p14:dur="1250">
+        <p15:prstTrans prst="airplane"/>
+      </p:transition>
+    </mc:Choice>
+    <mc:Fallback>
+      <p:transition spd="slow">
+        <p:fade/>
+      </p:transition>
+    </mc:Fallback>
+  </mc:AlternateContent>
 </p:sld>
 </file>
 
@@ -9924,6 +9977,18 @@
   <p:clrMapOvr>
     <a:masterClrMapping/>
   </p:clrMapOvr>
+  <mc:AlternateContent xmlns:mc="http://schemas.openxmlformats.org/markup-compatibility/2006">
+    <mc:Choice xmlns:p14="http://schemas.microsoft.com/office/powerpoint/2010/main" Requires="p14">
+      <p:transition spd="slow" p14:dur="1400">
+        <p14:ripple/>
+      </p:transition>
+    </mc:Choice>
+    <mc:Fallback>
+      <p:transition spd="slow">
+        <p:fade/>
+      </p:transition>
+    </mc:Fallback>
+  </mc:AlternateContent>
 </p:sld>
 </file>
 
@@ -11084,6 +11149,18 @@
   <p:clrMapOvr>
     <a:masterClrMapping/>
   </p:clrMapOvr>
+  <mc:AlternateContent xmlns:mc="http://schemas.openxmlformats.org/markup-compatibility/2006">
+    <mc:Choice xmlns:p15="http://schemas.microsoft.com/office/powerpoint/2012/main" Requires="p15">
+      <p:transition xmlns:p14="http://schemas.microsoft.com/office/powerpoint/2010/main" spd="slow" p14:dur="3250">
+        <p15:prstTrans prst="origami"/>
+      </p:transition>
+    </mc:Choice>
+    <mc:Fallback>
+      <p:transition spd="slow">
+        <p:fade/>
+      </p:transition>
+    </mc:Fallback>
+  </mc:AlternateContent>
 </p:sld>
 </file>
 
@@ -12252,6 +12329,18 @@
   <p:clrMapOvr>
     <a:masterClrMapping/>
   </p:clrMapOvr>
+  <mc:AlternateContent xmlns:mc="http://schemas.openxmlformats.org/markup-compatibility/2006">
+    <mc:Choice xmlns:p14="http://schemas.microsoft.com/office/powerpoint/2010/main" Requires="p14">
+      <p:transition spd="slow" p14:dur="4000">
+        <p14:vortex dir="r"/>
+      </p:transition>
+    </mc:Choice>
+    <mc:Fallback>
+      <p:transition spd="slow">
+        <p:fade/>
+      </p:transition>
+    </mc:Fallback>
+  </mc:AlternateContent>
 </p:sld>
 </file>
 
